--- a/foundation/building-blocks/architecture-building-blocks/AB-004/components-and-summary.pptx
+++ b/foundation/building-blocks/architecture-building-blocks/AB-004/components-and-summary.pptx
@@ -3140,7 +3140,7 @@
         <p:spPr>
           <a:xfrm>
             <a:off x="223637" y="720989"/>
-            <a:ext cx="4881061" cy="5491194"/>
+            <a:ext cx="5552207" cy="5491194"/>
           </a:xfrm>
           <a:prstGeom prst="rect">
             <a:avLst/>
